--- a/ppt/IoTAI14-KerasModels.pptx
+++ b/ppt/IoTAI14-KerasModels.pptx
@@ -3699,30 +3699,6 @@
           </a:p>
         </p:txBody>
       </p:sp>
-      <p:pic>
-        <p:nvPicPr>
-          <p:cNvPr id="2" name="Image 1"/>
-          <p:cNvPicPr>
-            <a:picLocks noChangeAspect="1"/>
-          </p:cNvPicPr>
-          <p:nvPr/>
-        </p:nvPicPr>
-        <p:blipFill>
-          <a:blip r:embed="rId2"/>
-          <a:stretch>
-            <a:fillRect/>
-          </a:stretch>
-        </p:blipFill>
-        <p:spPr>
-          <a:xfrm>
-            <a:off x="1214437" y="5023445"/>
-            <a:ext cx="6715125" cy="1285875"/>
-          </a:xfrm>
-          <a:prstGeom prst="rect">
-            <a:avLst/>
-          </a:prstGeom>
-        </p:spPr>
-      </p:pic>
       <p:sp>
         <p:nvSpPr>
           <p:cNvPr id="3" name="ZoneTexte 2"/>
@@ -3761,7 +3737,7 @@
           <p:nvPr/>
         </p:nvPicPr>
         <p:blipFill>
-          <a:blip r:embed="rId3"/>
+          <a:blip r:embed="rId2"/>
           <a:stretch>
             <a:fillRect/>
           </a:stretch>
